--- a/CAPSTONE/bus311-capstone-board-deck-template.pptx
+++ b/CAPSTONE/bus311-capstone-board-deck-template.pptx
@@ -2,26 +2,26 @@
 <file path=ppt/presentation.xml><?xml version="1.0" encoding="utf-8"?>
 <p:presentation xmlns:p="http://schemas.openxmlformats.org/presentationml/2006/main">
   <p:sldMasterIdLst>
-    <p:sldMasterId xmlns:r="http://schemas.openxmlformats.org/officeDocument/2006/relationships" id="2147483648" r:id="Ra907065c212340a0"/>
+    <p:sldMasterId xmlns:r="http://schemas.openxmlformats.org/officeDocument/2006/relationships" id="2147483648" r:id="R788b24ca34794d6d"/>
   </p:sldMasterIdLst>
   <p:notesMasterIdLst>
-    <p:notesMasterId xmlns:r="http://schemas.openxmlformats.org/officeDocument/2006/relationships" r:id="Rcf23d7afab5c41ef"/>
+    <p:notesMasterId xmlns:r="http://schemas.openxmlformats.org/officeDocument/2006/relationships" r:id="Rf06b03f1b5a54dda"/>
   </p:notesMasterIdLst>
   <p:sldIdLst>
-    <p:sldId xmlns:r="http://schemas.openxmlformats.org/officeDocument/2006/relationships" id="256" r:id="R25cccd7453a940c2"/>
-    <p:sldId xmlns:r="http://schemas.openxmlformats.org/officeDocument/2006/relationships" id="257" r:id="R6177eaa665cf4179"/>
-    <p:sldId xmlns:r="http://schemas.openxmlformats.org/officeDocument/2006/relationships" id="258" r:id="R810207d1428d46a4"/>
-    <p:sldId xmlns:r="http://schemas.openxmlformats.org/officeDocument/2006/relationships" id="259" r:id="Rb6d2652dae814dff"/>
-    <p:sldId xmlns:r="http://schemas.openxmlformats.org/officeDocument/2006/relationships" id="260" r:id="Rce577b834a5f4955"/>
-    <p:sldId xmlns:r="http://schemas.openxmlformats.org/officeDocument/2006/relationships" id="261" r:id="R6abad8d30c7844e2"/>
-    <p:sldId xmlns:r="http://schemas.openxmlformats.org/officeDocument/2006/relationships" id="262" r:id="Rb236459a2c704567"/>
-    <p:sldId xmlns:r="http://schemas.openxmlformats.org/officeDocument/2006/relationships" id="263" r:id="R3756a983e11c4b50"/>
-    <p:sldId xmlns:r="http://schemas.openxmlformats.org/officeDocument/2006/relationships" id="264" r:id="Ra9bc332e4bad4930"/>
-    <p:sldId xmlns:r="http://schemas.openxmlformats.org/officeDocument/2006/relationships" id="265" r:id="Rfc58937f20014d48"/>
-    <p:sldId xmlns:r="http://schemas.openxmlformats.org/officeDocument/2006/relationships" id="266" r:id="Rc811acb1e3354d82"/>
-    <p:sldId xmlns:r="http://schemas.openxmlformats.org/officeDocument/2006/relationships" id="267" r:id="R821948e3754c479e"/>
-    <p:sldId xmlns:r="http://schemas.openxmlformats.org/officeDocument/2006/relationships" id="268" r:id="R073a4cc897e547fe"/>
-    <p:sldId xmlns:r="http://schemas.openxmlformats.org/officeDocument/2006/relationships" id="269" r:id="R26d24a82a02440db"/>
+    <p:sldId xmlns:r="http://schemas.openxmlformats.org/officeDocument/2006/relationships" id="256" r:id="Rafed6ce90e1a4c22"/>
+    <p:sldId xmlns:r="http://schemas.openxmlformats.org/officeDocument/2006/relationships" id="257" r:id="R25565767ad114b57"/>
+    <p:sldId xmlns:r="http://schemas.openxmlformats.org/officeDocument/2006/relationships" id="258" r:id="R920b428f03b04955"/>
+    <p:sldId xmlns:r="http://schemas.openxmlformats.org/officeDocument/2006/relationships" id="259" r:id="Rd80187beafea48d9"/>
+    <p:sldId xmlns:r="http://schemas.openxmlformats.org/officeDocument/2006/relationships" id="260" r:id="R8047e206dd18429d"/>
+    <p:sldId xmlns:r="http://schemas.openxmlformats.org/officeDocument/2006/relationships" id="261" r:id="R7818c9960fe84f76"/>
+    <p:sldId xmlns:r="http://schemas.openxmlformats.org/officeDocument/2006/relationships" id="262" r:id="R1490db6cdb5b485b"/>
+    <p:sldId xmlns:r="http://schemas.openxmlformats.org/officeDocument/2006/relationships" id="263" r:id="Rcd1a0ecf2b284dd1"/>
+    <p:sldId xmlns:r="http://schemas.openxmlformats.org/officeDocument/2006/relationships" id="264" r:id="R9958b80e7a704d54"/>
+    <p:sldId xmlns:r="http://schemas.openxmlformats.org/officeDocument/2006/relationships" id="265" r:id="R03b2fcb0e0a841dc"/>
+    <p:sldId xmlns:r="http://schemas.openxmlformats.org/officeDocument/2006/relationships" id="266" r:id="R76bb0e0e10004b9a"/>
+    <p:sldId xmlns:r="http://schemas.openxmlformats.org/officeDocument/2006/relationships" id="267" r:id="Rfe9680e108fa4c7b"/>
+    <p:sldId xmlns:r="http://schemas.openxmlformats.org/officeDocument/2006/relationships" id="268" r:id="R45c156f7f416459c"/>
+    <p:sldId xmlns:r="http://schemas.openxmlformats.org/officeDocument/2006/relationships" id="269" r:id="R296fe3f82c7d4c9d"/>
   </p:sldIdLst>
   <p:sldSz cx="12192000" cy="6858000"/>
   <p:notesSz cx="6858000" cy="9144000"/>
@@ -485,7 +485,7 @@
           </a:p>
           <a:p xmlns:a="http://schemas.openxmlformats.org/drawingml/2006/main">
             <a:r>
-              <a:t>- Keep the core briefing within seven minutes; use appendix slides only for Q&amp;A.</a:t>
+              <a:t>- Keep the core briefing within seven minutes; use appendix slides only for live questions.</a:t>
             </a:r>
           </a:p>
           <a:p xmlns:a="http://schemas.openxmlformats.org/drawingml/2006/main">
@@ -540,7 +540,7 @@
           </a:p>
           <a:p xmlns:a="http://schemas.openxmlformats.org/drawingml/2006/main">
             <a:r>
-              <a:t>- BUS311 Individual Company Capstone assignment brief, instructor-review draft, July 28, 2026.</a:t>
+              <a:t>- BUS311 Individual Company Capstone assignment brief, approved student release v1.4.0, Aug. 11, 2026.</a:t>
             </a:r>
           </a:p>
           <a:p xmlns:a="http://schemas.openxmlformats.org/drawingml/2006/main">
@@ -650,7 +650,7 @@
           </a:p>
           <a:p xmlns:a="http://schemas.openxmlformats.org/drawingml/2006/main">
             <a:r>
-              <a:t>- Keep the core briefing within seven minutes; use appendix slides only for Q&amp;A.</a:t>
+              <a:t>- Keep the core briefing within seven minutes; use appendix slides only for live questions.</a:t>
             </a:r>
           </a:p>
           <a:p xmlns:a="http://schemas.openxmlformats.org/drawingml/2006/main">
@@ -670,7 +670,7 @@
           </a:p>
           <a:p xmlns:a="http://schemas.openxmlformats.org/drawingml/2006/main">
             <a:r>
-              <a:t>- Move to appendix slides only in response to Q&amp;A.</a:t>
+              <a:t>- Move to appendix slides only in response to live questions.</a:t>
             </a:r>
           </a:p>
           <a:p xmlns:a="http://schemas.openxmlformats.org/drawingml/2006/main">
@@ -705,12 +705,12 @@
           </a:p>
           <a:p xmlns:a="http://schemas.openxmlformats.org/drawingml/2006/main">
             <a:r>
-              <a:t>- BUS311 Individual Company Capstone assignment brief, instructor-review draft, July 28, 2026.</a:t>
-            </a:r>
-          </a:p>
-          <a:p xmlns:a="http://schemas.openxmlformats.org/drawingml/2006/main">
-            <a:r>
-              <a:t>- Use the same recommendation language as the executive summary and earlier core slides.</a:t>
+              <a:t>- BUS311 Individual Company Capstone assignment brief, approved student release v1.4.0, Aug. 11, 2026.</a:t>
+            </a:r>
+          </a:p>
+          <a:p xmlns:a="http://schemas.openxmlformats.org/drawingml/2006/main">
+            <a:r>
+              <a:t>- Use the same recommendation language throughout the submitted PowerPoint and earlier core slides.</a:t>
             </a:r>
           </a:p>
           <a:p xmlns:a="http://schemas.openxmlformats.org/drawingml/2006/main">
@@ -785,7 +785,7 @@
           <a:lstStyle xmlns:a="http://schemas.openxmlformats.org/drawingml/2006/main"/>
           <a:p xmlns:a="http://schemas.openxmlformats.org/drawingml/2006/main">
             <a:r>
-              <a:t>TIMING TARGET: Q&amp;A ONLY</a:t>
+              <a:t>TIMING TARGET: LIVE QUESTIONS ONLY</a:t>
             </a:r>
           </a:p>
           <a:p xmlns:a="http://schemas.openxmlformats.org/drawingml/2006/main">
@@ -815,7 +815,7 @@
           </a:p>
           <a:p xmlns:a="http://schemas.openxmlformats.org/drawingml/2006/main">
             <a:r>
-              <a:t>- Keep the core briefing within seven minutes; use appendix slides only for Q&amp;A.</a:t>
+              <a:t>- Keep the core briefing within seven minutes; use appendix slides only for live questions.</a:t>
             </a:r>
           </a:p>
           <a:p xmlns:a="http://schemas.openxmlformats.org/drawingml/2006/main">
@@ -870,7 +870,7 @@
           </a:p>
           <a:p xmlns:a="http://schemas.openxmlformats.org/drawingml/2006/main">
             <a:r>
-              <a:t>- BUS311 Individual Company Capstone assignment brief, instructor-review draft, July 28, 2026.</a:t>
+              <a:t>- BUS311 Individual Company Capstone assignment brief, approved student release v1.4.0, Aug. 11, 2026.</a:t>
             </a:r>
           </a:p>
           <a:p xmlns:a="http://schemas.openxmlformats.org/drawingml/2006/main">
@@ -950,7 +950,7 @@
           <a:lstStyle xmlns:a="http://schemas.openxmlformats.org/drawingml/2006/main"/>
           <a:p xmlns:a="http://schemas.openxmlformats.org/drawingml/2006/main">
             <a:r>
-              <a:t>TIMING TARGET: Q&amp;A ONLY</a:t>
+              <a:t>TIMING TARGET: LIVE QUESTIONS ONLY</a:t>
             </a:r>
           </a:p>
           <a:p xmlns:a="http://schemas.openxmlformats.org/drawingml/2006/main">
@@ -980,7 +980,7 @@
           </a:p>
           <a:p xmlns:a="http://schemas.openxmlformats.org/drawingml/2006/main">
             <a:r>
-              <a:t>- Keep the core briefing within seven minutes; use appendix slides only for Q&amp;A.</a:t>
+              <a:t>- Keep the core briefing within seven minutes; use appendix slides only for live questions.</a:t>
             </a:r>
           </a:p>
           <a:p xmlns:a="http://schemas.openxmlformats.org/drawingml/2006/main">
@@ -1035,7 +1035,7 @@
           </a:p>
           <a:p xmlns:a="http://schemas.openxmlformats.org/drawingml/2006/main">
             <a:r>
-              <a:t>- BUS311 Individual Company Capstone assignment brief, instructor-review draft, July 28, 2026.</a:t>
+              <a:t>- BUS311 Individual Company Capstone assignment brief, approved student release v1.4.0, Aug. 11, 2026.</a:t>
             </a:r>
           </a:p>
           <a:p xmlns:a="http://schemas.openxmlformats.org/drawingml/2006/main">
@@ -1115,7 +1115,7 @@
           <a:lstStyle xmlns:a="http://schemas.openxmlformats.org/drawingml/2006/main"/>
           <a:p xmlns:a="http://schemas.openxmlformats.org/drawingml/2006/main">
             <a:r>
-              <a:t>TIMING TARGET: Q&amp;A ONLY</a:t>
+              <a:t>TIMING TARGET: LIVE QUESTIONS ONLY</a:t>
             </a:r>
           </a:p>
           <a:p xmlns:a="http://schemas.openxmlformats.org/drawingml/2006/main">
@@ -1145,7 +1145,7 @@
           </a:p>
           <a:p xmlns:a="http://schemas.openxmlformats.org/drawingml/2006/main">
             <a:r>
-              <a:t>- Keep the core briefing within seven minutes; use appendix slides only for Q&amp;A.</a:t>
+              <a:t>- Keep the core briefing within seven minutes; use appendix slides only for live questions.</a:t>
             </a:r>
           </a:p>
           <a:p xmlns:a="http://schemas.openxmlformats.org/drawingml/2006/main">
@@ -1200,7 +1200,7 @@
           </a:p>
           <a:p xmlns:a="http://schemas.openxmlformats.org/drawingml/2006/main">
             <a:r>
-              <a:t>- BUS311 Individual Company Capstone assignment brief, instructor-review draft, July 28, 2026.</a:t>
+              <a:t>- BUS311 Individual Company Capstone assignment brief, approved student release v1.4.0, Aug. 11, 2026.</a:t>
             </a:r>
           </a:p>
           <a:p xmlns:a="http://schemas.openxmlformats.org/drawingml/2006/main">
@@ -1280,7 +1280,7 @@
           <a:lstStyle xmlns:a="http://schemas.openxmlformats.org/drawingml/2006/main"/>
           <a:p xmlns:a="http://schemas.openxmlformats.org/drawingml/2006/main">
             <a:r>
-              <a:t>TIMING TARGET: Q&amp;A ONLY</a:t>
+              <a:t>TIMING TARGET: LIVE QUESTIONS ONLY</a:t>
             </a:r>
           </a:p>
           <a:p xmlns:a="http://schemas.openxmlformats.org/drawingml/2006/main">
@@ -1310,7 +1310,7 @@
           </a:p>
           <a:p xmlns:a="http://schemas.openxmlformats.org/drawingml/2006/main">
             <a:r>
-              <a:t>- Keep the core briefing within seven minutes; use appendix slides only for Q&amp;A.</a:t>
+              <a:t>- Keep the core briefing within seven minutes; use appendix slides only for live questions.</a:t>
             </a:r>
           </a:p>
           <a:p xmlns:a="http://schemas.openxmlformats.org/drawingml/2006/main">
@@ -1370,7 +1370,7 @@
           </a:p>
           <a:p xmlns:a="http://schemas.openxmlformats.org/drawingml/2006/main">
             <a:r>
-              <a:t>- BUS311 Individual Company Capstone assignment brief, instructor-review draft, July 28, 2026.</a:t>
+              <a:t>- BUS311 Individual Company Capstone assignment brief, approved student release v1.4.0, Aug. 11, 2026.</a:t>
             </a:r>
           </a:p>
           <a:p xmlns:a="http://schemas.openxmlformats.org/drawingml/2006/main">
@@ -1480,7 +1480,7 @@
           </a:p>
           <a:p xmlns:a="http://schemas.openxmlformats.org/drawingml/2006/main">
             <a:r>
-              <a:t>- Keep the core briefing within seven minutes; use appendix slides only for Q&amp;A.</a:t>
+              <a:t>- Keep the core briefing within seven minutes; use appendix slides only for live questions.</a:t>
             </a:r>
           </a:p>
           <a:p xmlns:a="http://schemas.openxmlformats.org/drawingml/2006/main">
@@ -1535,7 +1535,7 @@
           </a:p>
           <a:p xmlns:a="http://schemas.openxmlformats.org/drawingml/2006/main">
             <a:r>
-              <a:t>- BUS311 Individual Company Capstone assignment brief, instructor-review draft, July 28, 2026.</a:t>
+              <a:t>- BUS311 Individual Company Capstone assignment brief, approved student release v1.4.0, Aug. 11, 2026.</a:t>
             </a:r>
           </a:p>
           <a:p xmlns:a="http://schemas.openxmlformats.org/drawingml/2006/main">
@@ -1650,7 +1650,7 @@
           </a:p>
           <a:p xmlns:a="http://schemas.openxmlformats.org/drawingml/2006/main">
             <a:r>
-              <a:t>- Keep the core briefing within seven minutes; use appendix slides only for Q&amp;A.</a:t>
+              <a:t>- Keep the core briefing within seven minutes; use appendix slides only for live questions.</a:t>
             </a:r>
           </a:p>
           <a:p xmlns:a="http://schemas.openxmlformats.org/drawingml/2006/main">
@@ -1710,7 +1710,7 @@
           </a:p>
           <a:p xmlns:a="http://schemas.openxmlformats.org/drawingml/2006/main">
             <a:r>
-              <a:t>- BUS311 Individual Company Capstone assignment brief, instructor-review draft, July 28, 2026.</a:t>
+              <a:t>- BUS311 Individual Company Capstone assignment brief, approved student release v1.4.0, Aug. 11, 2026.</a:t>
             </a:r>
           </a:p>
           <a:p xmlns:a="http://schemas.openxmlformats.org/drawingml/2006/main">
@@ -1820,7 +1820,7 @@
           </a:p>
           <a:p xmlns:a="http://schemas.openxmlformats.org/drawingml/2006/main">
             <a:r>
-              <a:t>- Keep the core briefing within seven minutes; use appendix slides only for Q&amp;A.</a:t>
+              <a:t>- Keep the core briefing within seven minutes; use appendix slides only for live questions.</a:t>
             </a:r>
           </a:p>
           <a:p xmlns:a="http://schemas.openxmlformats.org/drawingml/2006/main">
@@ -1880,7 +1880,7 @@
           </a:p>
           <a:p xmlns:a="http://schemas.openxmlformats.org/drawingml/2006/main">
             <a:r>
-              <a:t>- BUS311 Individual Company Capstone assignment brief, instructor-review draft, July 28, 2026.</a:t>
+              <a:t>- BUS311 Individual Company Capstone assignment brief, approved student release v1.4.0, Aug. 11, 2026.</a:t>
             </a:r>
           </a:p>
           <a:p xmlns:a="http://schemas.openxmlformats.org/drawingml/2006/main">
@@ -1990,7 +1990,7 @@
           </a:p>
           <a:p xmlns:a="http://schemas.openxmlformats.org/drawingml/2006/main">
             <a:r>
-              <a:t>- Keep the core briefing within seven minutes; use appendix slides only for Q&amp;A.</a:t>
+              <a:t>- Keep the core briefing within seven minutes; use appendix slides only for live questions.</a:t>
             </a:r>
           </a:p>
           <a:p xmlns:a="http://schemas.openxmlformats.org/drawingml/2006/main">
@@ -2015,7 +2015,7 @@
           </a:p>
           <a:p xmlns:a="http://schemas.openxmlformats.org/drawingml/2006/main">
             <a:r>
-              <a:t>- Use the same scenario labels and assumptions in the model, core deck, appendix, and executive summary.</a:t>
+              <a:t>- Use the same scenario labels and assumptions in the model, core deck, appendix, and PowerPoint company analysis.</a:t>
             </a:r>
           </a:p>
           <a:p xmlns:a="http://schemas.openxmlformats.org/drawingml/2006/main">
@@ -2050,7 +2050,7 @@
           </a:p>
           <a:p xmlns:a="http://schemas.openxmlformats.org/drawingml/2006/main">
             <a:r>
-              <a:t>- BUS311 Individual Company Capstone assignment brief, instructor-review draft, July 28, 2026.</a:t>
+              <a:t>- BUS311 Individual Company Capstone assignment brief, approved student release v1.4.0, Aug. 11, 2026.</a:t>
             </a:r>
           </a:p>
           <a:p xmlns:a="http://schemas.openxmlformats.org/drawingml/2006/main">
@@ -2160,7 +2160,7 @@
           </a:p>
           <a:p xmlns:a="http://schemas.openxmlformats.org/drawingml/2006/main">
             <a:r>
-              <a:t>- Keep the core briefing within seven minutes; use appendix slides only for Q&amp;A.</a:t>
+              <a:t>- Keep the core briefing within seven minutes; use appendix slides only for live questions.</a:t>
             </a:r>
           </a:p>
           <a:p xmlns:a="http://schemas.openxmlformats.org/drawingml/2006/main">
@@ -2220,12 +2220,12 @@
           </a:p>
           <a:p xmlns:a="http://schemas.openxmlformats.org/drawingml/2006/main">
             <a:r>
-              <a:t>- BUS311 Individual Company Capstone assignment brief, instructor-review draft, July 28, 2026.</a:t>
-            </a:r>
-          </a:p>
-          <a:p xmlns:a="http://schemas.openxmlformats.org/drawingml/2006/main">
-            <a:r>
-              <a:t>- Appendix slides must expose key assumptions, checks, scenarios, and sensitivities for Q&amp;A.</a:t>
+              <a:t>- BUS311 Individual Company Capstone assignment brief, approved student release v1.4.0, Aug. 11, 2026.</a:t>
+            </a:r>
+          </a:p>
+          <a:p xmlns:a="http://schemas.openxmlformats.org/drawingml/2006/main">
+            <a:r>
+              <a:t>- Appendix slides must expose key assumptions, checks, scenarios, and sensitivities for live questions.</a:t>
             </a:r>
           </a:p>
           <a:p xmlns:a="http://schemas.openxmlformats.org/drawingml/2006/main">
@@ -2330,7 +2330,7 @@
           </a:p>
           <a:p xmlns:a="http://schemas.openxmlformats.org/drawingml/2006/main">
             <a:r>
-              <a:t>- Keep the core briefing within seven minutes; use appendix slides only for Q&amp;A.</a:t>
+              <a:t>- Keep the core briefing within seven minutes; use appendix slides only for live questions.</a:t>
             </a:r>
           </a:p>
           <a:p xmlns:a="http://schemas.openxmlformats.org/drawingml/2006/main">
@@ -2385,7 +2385,7 @@
           </a:p>
           <a:p xmlns:a="http://schemas.openxmlformats.org/drawingml/2006/main">
             <a:r>
-              <a:t>- BUS311 Individual Company Capstone assignment brief, instructor-review draft, July 28, 2026.</a:t>
+              <a:t>- BUS311 Individual Company Capstone assignment brief, approved student release v1.4.0, Aug. 11, 2026.</a:t>
             </a:r>
           </a:p>
           <a:p xmlns:a="http://schemas.openxmlformats.org/drawingml/2006/main">
@@ -2495,7 +2495,7 @@
           </a:p>
           <a:p xmlns:a="http://schemas.openxmlformats.org/drawingml/2006/main">
             <a:r>
-              <a:t>- Keep the core briefing within seven minutes; use appendix slides only for Q&amp;A.</a:t>
+              <a:t>- Keep the core briefing within seven minutes; use appendix slides only for live questions.</a:t>
             </a:r>
           </a:p>
           <a:p xmlns:a="http://schemas.openxmlformats.org/drawingml/2006/main">
@@ -2550,7 +2550,7 @@
           </a:p>
           <a:p xmlns:a="http://schemas.openxmlformats.org/drawingml/2006/main">
             <a:r>
-              <a:t>- BUS311 Individual Company Capstone assignment brief, instructor-review draft, July 28, 2026.</a:t>
+              <a:t>- BUS311 Individual Company Capstone assignment brief, approved student release v1.4.0, Aug. 11, 2026.</a:t>
             </a:r>
           </a:p>
           <a:p xmlns:a="http://schemas.openxmlformats.org/drawingml/2006/main">
@@ -2660,7 +2660,7 @@
           </a:p>
           <a:p xmlns:a="http://schemas.openxmlformats.org/drawingml/2006/main">
             <a:r>
-              <a:t>- Keep the core briefing within seven minutes; use appendix slides only for Q&amp;A.</a:t>
+              <a:t>- Keep the core briefing within seven minutes; use appendix slides only for live questions.</a:t>
             </a:r>
           </a:p>
           <a:p xmlns:a="http://schemas.openxmlformats.org/drawingml/2006/main">
@@ -2715,7 +2715,7 @@
           </a:p>
           <a:p xmlns:a="http://schemas.openxmlformats.org/drawingml/2006/main">
             <a:r>
-              <a:t>- BUS311 Individual Company Capstone assignment brief, instructor-review draft, July 28, 2026.</a:t>
+              <a:t>- BUS311 Individual Company Capstone assignment brief, approved student release v1.4.0, Aug. 11, 2026.</a:t>
             </a:r>
           </a:p>
           <a:p xmlns:a="http://schemas.openxmlformats.org/drawingml/2006/main">
@@ -2793,7 +2793,7 @@
   </p:cSld>
   <p:clrMap bg1="lt1" tx1="dk1" bg2="lt2" tx2="dk2" accent1="accent1" accent2="accent2" accent3="accent3" accent4="accent4" accent5="accent5" accent6="accent6" hlink="hlink" folHlink="folHlink"/>
   <p:sldLayoutIdLst>
-    <p:sldLayoutId xmlns:r="http://schemas.openxmlformats.org/officeDocument/2006/relationships" id="2147483649" r:id="R3586b4a3fe9143c8"/>
+    <p:sldLayoutId xmlns:r="http://schemas.openxmlformats.org/officeDocument/2006/relationships" id="2147483649" r:id="Rf3e7df525ca9439c"/>
   </p:sldLayoutIdLst>
   <p:txStyles>
     <p:titleStyle>
@@ -3358,6 +3358,7 @@
     <c:plotArea>
       <c:lineChart>
         <c:grouping val="standard"/>
+        <c:varyColors val="0"/>
         <c:ser>
           <c:idx val="0"/>
           <c:order val="0"/>
@@ -3586,9 +3587,6 @@
           </a:p>
         </c:txPr>
         <c:crossAx val="48672768"/>
-        <c:lblAlgn val="ctr"/>
-        <c:lblOffset val="100"/>
-        <c:noMultiLvlLbl val="0"/>
       </c:catAx>
       <c:valAx>
         <c:axId val="48672768"/>
@@ -3727,6 +3725,7 @@
     <c:plotArea>
       <c:lineChart>
         <c:grouping val="standard"/>
+        <c:varyColors val="0"/>
         <c:ser>
           <c:idx val="0"/>
           <c:order val="0"/>
@@ -3955,9 +3954,6 @@
           </a:p>
         </c:txPr>
         <c:crossAx val="48672768"/>
-        <c:lblAlgn val="ctr"/>
-        <c:lblOffset val="100"/>
-        <c:noMultiLvlLbl val="0"/>
       </c:catAx>
       <c:valAx>
         <c:axId val="48672768"/>
@@ -4225,9 +4221,6 @@
           </a:p>
         </c:txPr>
         <c:crossAx val="48672768"/>
-        <c:lblAlgn val="ctr"/>
-        <c:lblOffset val="100"/>
-        <c:noMultiLvlLbl val="0"/>
       </c:catAx>
       <c:valAx>
         <c:axId val="48672768"/>
@@ -4365,6 +4358,7 @@
           <a:lstStyle xmlns:a="http://schemas.openxmlformats.org/drawingml/2006/main"/>
           <a:p xmlns:a="http://schemas.openxmlformats.org/drawingml/2006/main">
             <a:pPr algn="l">
+              <a:buNone/>
               <a:defRPr sz="1050" b="1">
                 <a:solidFill>
                   <a:srgbClr val="124B9A"/>
@@ -4423,6 +4417,7 @@
           <a:lstStyle xmlns:a="http://schemas.openxmlformats.org/drawingml/2006/main"/>
           <a:p xmlns:a="http://schemas.openxmlformats.org/drawingml/2006/main">
             <a:pPr algn="r">
+              <a:buNone/>
               <a:defRPr sz="975" b="1">
                 <a:solidFill>
                   <a:srgbClr val="536174"/>
@@ -4481,6 +4476,7 @@
           <a:lstStyle xmlns:a="http://schemas.openxmlformats.org/drawingml/2006/main"/>
           <a:p xmlns:a="http://schemas.openxmlformats.org/drawingml/2006/main">
             <a:pPr algn="l">
+              <a:buNone/>
               <a:defRPr sz="3900" b="1">
                 <a:solidFill>
                   <a:srgbClr val="0B1220"/>
@@ -4570,6 +4566,7 @@
           <a:lstStyle xmlns:a="http://schemas.openxmlformats.org/drawingml/2006/main"/>
           <a:p xmlns:a="http://schemas.openxmlformats.org/drawingml/2006/main">
             <a:pPr algn="l">
+              <a:buNone/>
               <a:defRPr sz="1050" b="1">
                 <a:solidFill>
                   <a:srgbClr val="FFFFFF"/>
@@ -4628,6 +4625,7 @@
           <a:lstStyle xmlns:a="http://schemas.openxmlformats.org/drawingml/2006/main"/>
           <a:p xmlns:a="http://schemas.openxmlformats.org/drawingml/2006/main">
             <a:pPr algn="l">
+              <a:buNone/>
               <a:defRPr sz="1575" b="1">
                 <a:solidFill>
                   <a:srgbClr val="FFFFFF"/>
@@ -4686,6 +4684,7 @@
           <a:lstStyle xmlns:a="http://schemas.openxmlformats.org/drawingml/2006/main"/>
           <a:p xmlns:a="http://schemas.openxmlformats.org/drawingml/2006/main">
             <a:pPr algn="l">
+              <a:buNone/>
               <a:defRPr sz="1125" b="1">
                 <a:solidFill>
                   <a:srgbClr val="124B9A"/>
@@ -4744,6 +4743,7 @@
           <a:lstStyle xmlns:a="http://schemas.openxmlformats.org/drawingml/2006/main"/>
           <a:p xmlns:a="http://schemas.openxmlformats.org/drawingml/2006/main">
             <a:pPr algn="l">
+              <a:buNone/>
               <a:defRPr sz="2100" b="1">
                 <a:solidFill>
                   <a:srgbClr val="0B1220"/>
@@ -4833,6 +4833,7 @@
           <a:lstStyle xmlns:a="http://schemas.openxmlformats.org/drawingml/2006/main"/>
           <a:p xmlns:a="http://schemas.openxmlformats.org/drawingml/2006/main">
             <a:pPr algn="l">
+              <a:buNone/>
               <a:defRPr sz="1425" b="1">
                 <a:solidFill>
                   <a:srgbClr val="0B1220"/>
@@ -4856,6 +4857,7 @@
           </a:p>
           <a:p xmlns:a="http://schemas.openxmlformats.org/drawingml/2006/main">
             <a:pPr algn="l">
+              <a:buNone/>
               <a:defRPr sz="1425" b="1">
                 <a:solidFill>
                   <a:srgbClr val="0B1220"/>
@@ -4914,6 +4916,7 @@
           <a:lstStyle xmlns:a="http://schemas.openxmlformats.org/drawingml/2006/main"/>
           <a:p xmlns:a="http://schemas.openxmlformats.org/drawingml/2006/main">
             <a:pPr algn="l">
+              <a:buNone/>
               <a:defRPr sz="1425" b="1">
                 <a:solidFill>
                   <a:srgbClr val="0B1220"/>
@@ -4937,6 +4940,7 @@
           </a:p>
           <a:p xmlns:a="http://schemas.openxmlformats.org/drawingml/2006/main">
             <a:pPr algn="l">
+              <a:buNone/>
               <a:defRPr sz="1425" b="1">
                 <a:solidFill>
                   <a:srgbClr val="0B1220"/>
@@ -4995,6 +4999,7 @@
           <a:lstStyle xmlns:a="http://schemas.openxmlformats.org/drawingml/2006/main"/>
           <a:p xmlns:a="http://schemas.openxmlformats.org/drawingml/2006/main">
             <a:pPr algn="l">
+              <a:buNone/>
               <a:defRPr sz="1425" b="1">
                 <a:solidFill>
                   <a:srgbClr val="0B1220"/>
@@ -5018,6 +5023,7 @@
           </a:p>
           <a:p xmlns:a="http://schemas.openxmlformats.org/drawingml/2006/main">
             <a:pPr algn="l">
+              <a:buNone/>
               <a:defRPr sz="1425" b="1">
                 <a:solidFill>
                   <a:srgbClr val="0B1220"/>
@@ -5107,6 +5113,7 @@
           <a:lstStyle xmlns:a="http://schemas.openxmlformats.org/drawingml/2006/main"/>
           <a:p xmlns:a="http://schemas.openxmlformats.org/drawingml/2006/main">
             <a:pPr algn="l">
+              <a:buNone/>
               <a:defRPr sz="825" b="0">
                 <a:solidFill>
                   <a:srgbClr val="536174"/>
@@ -5165,6 +5172,7 @@
           <a:lstStyle xmlns:a="http://schemas.openxmlformats.org/drawingml/2006/main"/>
           <a:p xmlns:a="http://schemas.openxmlformats.org/drawingml/2006/main">
             <a:pPr algn="r">
+              <a:buNone/>
               <a:defRPr sz="825" b="1">
                 <a:solidFill>
                   <a:srgbClr val="536174"/>
@@ -5252,6 +5260,7 @@
           <a:lstStyle xmlns:a="http://schemas.openxmlformats.org/drawingml/2006/main"/>
           <a:p xmlns:a="http://schemas.openxmlformats.org/drawingml/2006/main">
             <a:pPr algn="l">
+              <a:buNone/>
               <a:defRPr sz="1050" b="1">
                 <a:solidFill>
                   <a:srgbClr val="124B9A"/>
@@ -5310,6 +5319,7 @@
           <a:lstStyle xmlns:a="http://schemas.openxmlformats.org/drawingml/2006/main"/>
           <a:p xmlns:a="http://schemas.openxmlformats.org/drawingml/2006/main">
             <a:pPr algn="l">
+              <a:buNone/>
               <a:defRPr sz="3750" b="1">
                 <a:solidFill>
                   <a:srgbClr val="0B1220"/>
@@ -5368,6 +5378,7 @@
           <a:lstStyle xmlns:a="http://schemas.openxmlformats.org/drawingml/2006/main"/>
           <a:p xmlns:a="http://schemas.openxmlformats.org/drawingml/2006/main">
             <a:pPr algn="l">
+              <a:buNone/>
               <a:defRPr sz="1950" b="1">
                 <a:solidFill>
                   <a:srgbClr val="124B9A"/>
@@ -5457,6 +5468,7 @@
           <a:lstStyle xmlns:a="http://schemas.openxmlformats.org/drawingml/2006/main"/>
           <a:p xmlns:a="http://schemas.openxmlformats.org/drawingml/2006/main">
             <a:pPr algn="ctr">
+              <a:buNone/>
               <a:defRPr sz="4650" b="1">
                 <a:solidFill>
                   <a:srgbClr val="FFFFFF"/>
@@ -5482,7 +5494,7 @@
       </p:sp>
       <p:graphicFrame>
         <p:nvGraphicFramePr>
-          <p:cNvPr id="16" name=""/>
+          <p:cNvPr id="18" name=""/>
           <p:cNvGraphicFramePr/>
           <p:nvPr/>
         </p:nvGraphicFramePr>
@@ -5707,6 +5719,7 @@
           <a:lstStyle xmlns:a="http://schemas.openxmlformats.org/drawingml/2006/main"/>
           <a:p xmlns:a="http://schemas.openxmlformats.org/drawingml/2006/main">
             <a:pPr algn="ctr">
+              <a:buNone/>
               <a:defRPr sz="1800" b="1">
                 <a:solidFill>
                   <a:srgbClr val="0B1220"/>
@@ -5725,11 +5738,12 @@
                 <a:ea typeface="Aptos"/>
                 <a:cs typeface="Aptos"/>
               </a:rPr>
-              <a:t>Q&amp;A READY</a:t>
+              <a:t>QUESTION READY</a:t>
             </a:r>
           </a:p>
           <a:p xmlns:a="http://schemas.openxmlformats.org/drawingml/2006/main">
             <a:pPr algn="ctr">
+              <a:buNone/>
               <a:defRPr sz="1800" b="1">
                 <a:solidFill>
                   <a:srgbClr val="0B1220"/>
@@ -5819,6 +5833,7 @@
           <a:lstStyle xmlns:a="http://schemas.openxmlformats.org/drawingml/2006/main"/>
           <a:p xmlns:a="http://schemas.openxmlformats.org/drawingml/2006/main">
             <a:pPr algn="l">
+              <a:buNone/>
               <a:defRPr sz="825" b="0">
                 <a:solidFill>
                   <a:srgbClr val="536174"/>
@@ -5877,6 +5892,7 @@
           <a:lstStyle xmlns:a="http://schemas.openxmlformats.org/drawingml/2006/main"/>
           <a:p xmlns:a="http://schemas.openxmlformats.org/drawingml/2006/main">
             <a:pPr algn="r">
+              <a:buNone/>
               <a:defRPr sz="825" b="1">
                 <a:solidFill>
                   <a:srgbClr val="536174"/>
@@ -5964,6 +5980,7 @@
           <a:lstStyle xmlns:a="http://schemas.openxmlformats.org/drawingml/2006/main"/>
           <a:p xmlns:a="http://schemas.openxmlformats.org/drawingml/2006/main">
             <a:pPr algn="l">
+              <a:buNone/>
               <a:defRPr sz="975" b="1">
                 <a:solidFill>
                   <a:srgbClr val="124B9A"/>
@@ -5982,7 +5999,18 @@
                 <a:ea typeface="Aptos"/>
                 <a:cs typeface="Aptos"/>
               </a:rPr>
-              <a:t>ANALYTICAL APPENDIX  •  REVENUE Q&amp;A</a:t>
+              <a:t>ANALYTICAL APPENDIX  •  </a:t>
+            </a:r>
+            <a:r>
+              <a:rPr sz="975" b="1">
+                <a:solidFill>
+                  <a:srgbClr val="124B9A"/>
+                </a:solidFill>
+                <a:latin typeface="Aptos"/>
+                <a:ea typeface="Aptos"/>
+                <a:cs typeface="Aptos"/>
+              </a:rPr>
+              <a:t>REVENUE QUESTION SUPPORT</a:t>
             </a:r>
           </a:p>
         </p:txBody>
@@ -6022,6 +6050,7 @@
           <a:lstStyle xmlns:a="http://schemas.openxmlformats.org/drawingml/2006/main"/>
           <a:p xmlns:a="http://schemas.openxmlformats.org/drawingml/2006/main">
             <a:pPr algn="l">
+              <a:buNone/>
               <a:defRPr sz="2850" b="1">
                 <a:solidFill>
                   <a:srgbClr val="0B1220"/>
@@ -6082,6 +6111,7 @@
           <a:lstStyle xmlns:a="http://schemas.openxmlformats.org/drawingml/2006/main"/>
           <a:p xmlns:a="http://schemas.openxmlformats.org/drawingml/2006/main">
             <a:pPr algn="l">
+              <a:buNone/>
               <a:defRPr sz="825" b="1">
                 <a:solidFill>
                   <a:srgbClr val="124B9A"/>
@@ -6107,7 +6137,7 @@
       </p:sp>
       <p:graphicFrame>
         <p:nvGraphicFramePr>
-          <p:cNvPr id="12" name=""/>
+          <p:cNvPr id="14" name=""/>
           <p:cNvGraphicFramePr/>
           <p:nvPr/>
         </p:nvGraphicFramePr>
@@ -6884,6 +6914,7 @@
           <a:lstStyle xmlns:a="http://schemas.openxmlformats.org/drawingml/2006/main"/>
           <a:p xmlns:a="http://schemas.openxmlformats.org/drawingml/2006/main">
             <a:pPr algn="ctr">
+              <a:buNone/>
               <a:defRPr sz="1500" b="1">
                 <a:solidFill>
                   <a:srgbClr val="0B1220"/>
@@ -6902,7 +6933,18 @@
                 <a:ea typeface="Aptos"/>
                 <a:cs typeface="Aptos"/>
               </a:rPr>
-              <a:t>Q&amp;A prompts: What is disclosed vs inferred?  •  Which driver is repeatable?  •  Why is the peer group defensible?  •  Which definition limits comparability?</a:t>
+              <a:t>Live-question prompts:</a:t>
+            </a:r>
+            <a:r>
+              <a:rPr sz="1500" b="1">
+                <a:solidFill>
+                  <a:srgbClr val="0B1220"/>
+                </a:solidFill>
+                <a:latin typeface="Aptos"/>
+                <a:ea typeface="Aptos"/>
+                <a:cs typeface="Aptos"/>
+              </a:rPr>
+              <a:t> What is disclosed vs inferred?  •  Which driver is repeatable?  •  Why is the peer group defensible?  •  Which definition limits comparability?</a:t>
             </a:r>
           </a:p>
         </p:txBody>
@@ -6973,6 +7015,7 @@
           <a:lstStyle xmlns:a="http://schemas.openxmlformats.org/drawingml/2006/main"/>
           <a:p xmlns:a="http://schemas.openxmlformats.org/drawingml/2006/main">
             <a:pPr algn="l">
+              <a:buNone/>
               <a:defRPr sz="825" b="0">
                 <a:solidFill>
                   <a:srgbClr val="536174"/>
@@ -7031,6 +7074,7 @@
           <a:lstStyle xmlns:a="http://schemas.openxmlformats.org/drawingml/2006/main"/>
           <a:p xmlns:a="http://schemas.openxmlformats.org/drawingml/2006/main">
             <a:pPr algn="r">
+              <a:buNone/>
               <a:defRPr sz="825" b="1">
                 <a:solidFill>
                   <a:srgbClr val="536174"/>
@@ -7118,6 +7162,7 @@
           <a:lstStyle xmlns:a="http://schemas.openxmlformats.org/drawingml/2006/main"/>
           <a:p xmlns:a="http://schemas.openxmlformats.org/drawingml/2006/main">
             <a:pPr algn="l">
+              <a:buNone/>
               <a:defRPr sz="975" b="1">
                 <a:solidFill>
                   <a:srgbClr val="124B9A"/>
@@ -7136,7 +7181,18 @@
                 <a:ea typeface="Aptos"/>
                 <a:cs typeface="Aptos"/>
               </a:rPr>
-              <a:t>ANALYTICAL APPENDIX  •  MODEL Q&amp;A</a:t>
+              <a:t>ANALYTICAL APPENDIX  •  </a:t>
+            </a:r>
+            <a:r>
+              <a:rPr sz="975" b="1">
+                <a:solidFill>
+                  <a:srgbClr val="124B9A"/>
+                </a:solidFill>
+                <a:latin typeface="Aptos"/>
+                <a:ea typeface="Aptos"/>
+                <a:cs typeface="Aptos"/>
+              </a:rPr>
+              <a:t>MODEL QUESTION SUPPORT</a:t>
             </a:r>
           </a:p>
         </p:txBody>
@@ -7176,6 +7232,7 @@
           <a:lstStyle xmlns:a="http://schemas.openxmlformats.org/drawingml/2006/main"/>
           <a:p xmlns:a="http://schemas.openxmlformats.org/drawingml/2006/main">
             <a:pPr algn="l">
+              <a:buNone/>
               <a:defRPr sz="2850" b="1">
                 <a:solidFill>
                   <a:srgbClr val="0B1220"/>
@@ -7201,7 +7258,7 @@
       </p:sp>
       <p:graphicFrame>
         <p:nvGraphicFramePr>
-          <p:cNvPr id="10" name=""/>
+          <p:cNvPr id="12" name=""/>
           <p:cNvGraphicFramePr/>
           <p:nvPr/>
         </p:nvGraphicFramePr>
@@ -7894,6 +7951,7 @@
           <a:lstStyle xmlns:a="http://schemas.openxmlformats.org/drawingml/2006/main"/>
           <a:p xmlns:a="http://schemas.openxmlformats.org/drawingml/2006/main">
             <a:pPr algn="ctr">
+              <a:buNone/>
               <a:defRPr sz="1500" b="1">
                 <a:solidFill>
                   <a:srgbClr val="0B1220"/>
@@ -7983,6 +8041,7 @@
           <a:lstStyle xmlns:a="http://schemas.openxmlformats.org/drawingml/2006/main"/>
           <a:p xmlns:a="http://schemas.openxmlformats.org/drawingml/2006/main">
             <a:pPr algn="l">
+              <a:buNone/>
               <a:defRPr sz="825" b="0">
                 <a:solidFill>
                   <a:srgbClr val="536174"/>
@@ -8041,6 +8100,7 @@
           <a:lstStyle xmlns:a="http://schemas.openxmlformats.org/drawingml/2006/main"/>
           <a:p xmlns:a="http://schemas.openxmlformats.org/drawingml/2006/main">
             <a:pPr algn="r">
+              <a:buNone/>
               <a:defRPr sz="825" b="1">
                 <a:solidFill>
                   <a:srgbClr val="536174"/>
@@ -8128,6 +8188,7 @@
           <a:lstStyle xmlns:a="http://schemas.openxmlformats.org/drawingml/2006/main"/>
           <a:p xmlns:a="http://schemas.openxmlformats.org/drawingml/2006/main">
             <a:pPr algn="l">
+              <a:buNone/>
               <a:defRPr sz="975" b="1">
                 <a:solidFill>
                   <a:srgbClr val="124B9A"/>
@@ -8146,7 +8207,18 @@
                 <a:ea typeface="Aptos"/>
                 <a:cs typeface="Aptos"/>
               </a:rPr>
-              <a:t>ANALYTICAL APPENDIX  •  SENSITIVITY Q&amp;A</a:t>
+              <a:t>ANALYTICAL APPENDIX  •  </a:t>
+            </a:r>
+            <a:r>
+              <a:rPr sz="975" b="1">
+                <a:solidFill>
+                  <a:srgbClr val="124B9A"/>
+                </a:solidFill>
+                <a:latin typeface="Aptos"/>
+                <a:ea typeface="Aptos"/>
+                <a:cs typeface="Aptos"/>
+              </a:rPr>
+              <a:t>SENSITIVITY QUESTION SUPPORT</a:t>
             </a:r>
           </a:p>
         </p:txBody>
@@ -8186,6 +8258,7 @@
           <a:lstStyle xmlns:a="http://schemas.openxmlformats.org/drawingml/2006/main"/>
           <a:p xmlns:a="http://schemas.openxmlformats.org/drawingml/2006/main">
             <a:pPr algn="l">
+              <a:buNone/>
               <a:defRPr sz="2850" b="1">
                 <a:solidFill>
                   <a:srgbClr val="0B1220"/>
@@ -8246,6 +8319,7 @@
           <a:lstStyle xmlns:a="http://schemas.openxmlformats.org/drawingml/2006/main"/>
           <a:p xmlns:a="http://schemas.openxmlformats.org/drawingml/2006/main">
             <a:pPr algn="l">
+              <a:buNone/>
               <a:defRPr sz="825" b="1">
                 <a:solidFill>
                   <a:srgbClr val="124B9A"/>
@@ -8271,7 +8345,7 @@
       </p:sp>
       <p:graphicFrame>
         <p:nvGraphicFramePr>
-          <p:cNvPr id="12" name=""/>
+          <p:cNvPr id="14" name=""/>
           <p:cNvGraphicFramePr/>
           <p:nvPr/>
         </p:nvGraphicFramePr>
@@ -8946,6 +9020,7 @@
           <a:lstStyle xmlns:a="http://schemas.openxmlformats.org/drawingml/2006/main"/>
           <a:p xmlns:a="http://schemas.openxmlformats.org/drawingml/2006/main">
             <a:pPr algn="ctr">
+              <a:buNone/>
               <a:defRPr sz="1650" b="1">
                 <a:solidFill>
                   <a:srgbClr val="FFFFFF"/>
@@ -9035,6 +9110,7 @@
           <a:lstStyle xmlns:a="http://schemas.openxmlformats.org/drawingml/2006/main"/>
           <a:p xmlns:a="http://schemas.openxmlformats.org/drawingml/2006/main">
             <a:pPr algn="l">
+              <a:buNone/>
               <a:defRPr sz="825" b="0">
                 <a:solidFill>
                   <a:srgbClr val="536174"/>
@@ -9093,6 +9169,7 @@
           <a:lstStyle xmlns:a="http://schemas.openxmlformats.org/drawingml/2006/main"/>
           <a:p xmlns:a="http://schemas.openxmlformats.org/drawingml/2006/main">
             <a:pPr algn="r">
+              <a:buNone/>
               <a:defRPr sz="825" b="1">
                 <a:solidFill>
                   <a:srgbClr val="536174"/>
@@ -9180,6 +9257,7 @@
           <a:lstStyle xmlns:a="http://schemas.openxmlformats.org/drawingml/2006/main"/>
           <a:p xmlns:a="http://schemas.openxmlformats.org/drawingml/2006/main">
             <a:pPr algn="l">
+              <a:buNone/>
               <a:defRPr sz="975" b="1">
                 <a:solidFill>
                   <a:srgbClr val="124B9A"/>
@@ -9198,7 +9276,18 @@
                 <a:ea typeface="Aptos"/>
                 <a:cs typeface="Aptos"/>
               </a:rPr>
-              <a:t>ANALYTICAL APPENDIX  •  SOURCE Q&amp;A</a:t>
+              <a:t>ANALYTICAL APPENDIX  •  </a:t>
+            </a:r>
+            <a:r>
+              <a:rPr sz="975" b="1">
+                <a:solidFill>
+                  <a:srgbClr val="124B9A"/>
+                </a:solidFill>
+                <a:latin typeface="Aptos"/>
+                <a:ea typeface="Aptos"/>
+                <a:cs typeface="Aptos"/>
+              </a:rPr>
+              <a:t>SOURCE QUESTION SUPPORT</a:t>
             </a:r>
           </a:p>
         </p:txBody>
@@ -9238,6 +9327,7 @@
           <a:lstStyle xmlns:a="http://schemas.openxmlformats.org/drawingml/2006/main"/>
           <a:p xmlns:a="http://schemas.openxmlformats.org/drawingml/2006/main">
             <a:pPr algn="l">
+              <a:buNone/>
               <a:defRPr sz="2850" b="1">
                 <a:solidFill>
                   <a:srgbClr val="0B1220"/>
@@ -9296,6 +9386,7 @@
           <a:lstStyle xmlns:a="http://schemas.openxmlformats.org/drawingml/2006/main"/>
           <a:p xmlns:a="http://schemas.openxmlformats.org/drawingml/2006/main">
             <a:pPr algn="l">
+              <a:buNone/>
               <a:defRPr sz="1125" b="1">
                 <a:solidFill>
                   <a:srgbClr val="124B9A"/>
@@ -9358,6 +9449,7 @@
           <a:lstStyle xmlns:a="http://schemas.openxmlformats.org/drawingml/2006/main"/>
           <a:p xmlns:a="http://schemas.openxmlformats.org/drawingml/2006/main">
             <a:pPr algn="l">
+              <a:buNone/>
               <a:defRPr sz="1350" b="1">
                 <a:solidFill>
                   <a:srgbClr val="0B1220"/>
@@ -9386,6 +9478,7 @@
           </a:p>
           <a:p xmlns:a="http://schemas.openxmlformats.org/drawingml/2006/main">
             <a:pPr algn="l">
+              <a:buNone/>
               <a:defRPr sz="1350" b="1">
                 <a:solidFill>
                   <a:srgbClr val="0B1220"/>
@@ -9414,6 +9507,7 @@
           </a:p>
           <a:p xmlns:a="http://schemas.openxmlformats.org/drawingml/2006/main">
             <a:pPr algn="l">
+              <a:buNone/>
               <a:defRPr sz="1350" b="1">
                 <a:solidFill>
                   <a:srgbClr val="0B1220"/>
@@ -9472,6 +9566,7 @@
           <a:lstStyle xmlns:a="http://schemas.openxmlformats.org/drawingml/2006/main"/>
           <a:p xmlns:a="http://schemas.openxmlformats.org/drawingml/2006/main">
             <a:pPr algn="l">
+              <a:buNone/>
               <a:defRPr sz="1125" b="1">
                 <a:solidFill>
                   <a:srgbClr val="124B9A"/>
@@ -9534,6 +9629,7 @@
           <a:lstStyle xmlns:a="http://schemas.openxmlformats.org/drawingml/2006/main"/>
           <a:p xmlns:a="http://schemas.openxmlformats.org/drawingml/2006/main">
             <a:pPr algn="l">
+              <a:buNone/>
               <a:defRPr sz="1425" b="1">
                 <a:solidFill>
                   <a:srgbClr val="0B1220"/>
@@ -9562,6 +9658,7 @@
           </a:p>
           <a:p xmlns:a="http://schemas.openxmlformats.org/drawingml/2006/main">
             <a:pPr algn="l">
+              <a:buNone/>
               <a:defRPr sz="1425" b="1">
                 <a:solidFill>
                   <a:srgbClr val="0B1220"/>
@@ -9622,6 +9719,7 @@
           <a:lstStyle xmlns:a="http://schemas.openxmlformats.org/drawingml/2006/main"/>
           <a:p xmlns:a="http://schemas.openxmlformats.org/drawingml/2006/main">
             <a:pPr algn="ctr">
+              <a:buNone/>
               <a:defRPr sz="1425" b="1">
                 <a:solidFill>
                   <a:srgbClr val="FFFFFF"/>
@@ -9711,6 +9809,7 @@
           <a:lstStyle xmlns:a="http://schemas.openxmlformats.org/drawingml/2006/main"/>
           <a:p xmlns:a="http://schemas.openxmlformats.org/drawingml/2006/main">
             <a:pPr algn="l">
+              <a:buNone/>
               <a:defRPr sz="825" b="0">
                 <a:solidFill>
                   <a:srgbClr val="536174"/>
@@ -9769,6 +9868,7 @@
           <a:lstStyle xmlns:a="http://schemas.openxmlformats.org/drawingml/2006/main"/>
           <a:p xmlns:a="http://schemas.openxmlformats.org/drawingml/2006/main">
             <a:pPr algn="r">
+              <a:buNone/>
               <a:defRPr sz="825" b="1">
                 <a:solidFill>
                   <a:srgbClr val="536174"/>
@@ -9856,6 +9956,7 @@
           <a:lstStyle xmlns:a="http://schemas.openxmlformats.org/drawingml/2006/main"/>
           <a:p xmlns:a="http://schemas.openxmlformats.org/drawingml/2006/main">
             <a:pPr algn="l">
+              <a:buNone/>
               <a:defRPr sz="975" b="1">
                 <a:solidFill>
                   <a:srgbClr val="124B9A"/>
@@ -9914,6 +10015,7 @@
           <a:lstStyle xmlns:a="http://schemas.openxmlformats.org/drawingml/2006/main"/>
           <a:p xmlns:a="http://schemas.openxmlformats.org/drawingml/2006/main">
             <a:pPr algn="l">
+              <a:buNone/>
               <a:defRPr sz="2850" b="1">
                 <a:solidFill>
                   <a:srgbClr val="0B1220"/>
@@ -9972,6 +10074,7 @@
           <a:lstStyle xmlns:a="http://schemas.openxmlformats.org/drawingml/2006/main"/>
           <a:p xmlns:a="http://schemas.openxmlformats.org/drawingml/2006/main">
             <a:pPr algn="l">
+              <a:buNone/>
               <a:defRPr sz="1650" b="1">
                 <a:solidFill>
                   <a:srgbClr val="124B9A"/>
@@ -9997,7 +10100,7 @@
       </p:sp>
       <p:graphicFrame>
         <p:nvGraphicFramePr>
-          <p:cNvPr id="14" name=""/>
+          <p:cNvPr id="16" name=""/>
           <p:cNvGraphicFramePr/>
           <p:nvPr/>
         </p:nvGraphicFramePr>
@@ -10411,6 +10514,7 @@
           <a:lstStyle xmlns:a="http://schemas.openxmlformats.org/drawingml/2006/main"/>
           <a:p xmlns:a="http://schemas.openxmlformats.org/drawingml/2006/main">
             <a:pPr algn="l">
+              <a:buNone/>
               <a:defRPr sz="1050" b="1">
                 <a:solidFill>
                   <a:srgbClr val="124B9A"/>
@@ -10469,6 +10573,7 @@
           <a:lstStyle xmlns:a="http://schemas.openxmlformats.org/drawingml/2006/main"/>
           <a:p xmlns:a="http://schemas.openxmlformats.org/drawingml/2006/main">
             <a:pPr algn="l">
+              <a:buNone/>
               <a:defRPr sz="1725" b="1">
                 <a:solidFill>
                   <a:srgbClr val="0B1220"/>
@@ -10558,6 +10663,7 @@
           <a:lstStyle xmlns:a="http://schemas.openxmlformats.org/drawingml/2006/main"/>
           <a:p xmlns:a="http://schemas.openxmlformats.org/drawingml/2006/main">
             <a:pPr algn="l">
+              <a:buNone/>
               <a:defRPr sz="825" b="0">
                 <a:solidFill>
                   <a:srgbClr val="536174"/>
@@ -10616,6 +10722,7 @@
           <a:lstStyle xmlns:a="http://schemas.openxmlformats.org/drawingml/2006/main"/>
           <a:p xmlns:a="http://schemas.openxmlformats.org/drawingml/2006/main">
             <a:pPr algn="r">
+              <a:buNone/>
               <a:defRPr sz="825" b="1">
                 <a:solidFill>
                   <a:srgbClr val="536174"/>
@@ -10703,6 +10810,7 @@
           <a:lstStyle xmlns:a="http://schemas.openxmlformats.org/drawingml/2006/main"/>
           <a:p xmlns:a="http://schemas.openxmlformats.org/drawingml/2006/main">
             <a:pPr algn="l">
+              <a:buNone/>
               <a:defRPr sz="975" b="1">
                 <a:solidFill>
                   <a:srgbClr val="124B9A"/>
@@ -10761,6 +10869,7 @@
           <a:lstStyle xmlns:a="http://schemas.openxmlformats.org/drawingml/2006/main"/>
           <a:p xmlns:a="http://schemas.openxmlformats.org/drawingml/2006/main">
             <a:pPr algn="l">
+              <a:buNone/>
               <a:defRPr sz="2850" b="1">
                 <a:solidFill>
                   <a:srgbClr val="0B1220"/>
@@ -10821,6 +10930,7 @@
           <a:lstStyle xmlns:a="http://schemas.openxmlformats.org/drawingml/2006/main"/>
           <a:p xmlns:a="http://schemas.openxmlformats.org/drawingml/2006/main">
             <a:pPr algn="l">
+              <a:buNone/>
               <a:defRPr sz="825" b="1">
                 <a:solidFill>
                   <a:srgbClr val="124B9A"/>
@@ -10846,7 +10956,7 @@
       </p:sp>
       <p:graphicFrame>
         <p:nvGraphicFramePr>
-          <p:cNvPr id="14" name="Chart"/>
+          <p:cNvPr id="16" name="Chart"/>
           <p:cNvGraphicFramePr/>
           <p:nvPr/>
         </p:nvGraphicFramePr>
@@ -10856,7 +10966,7 @@
         </p:xfrm>
         <a:graphic xmlns:a="http://schemas.openxmlformats.org/drawingml/2006/main">
           <a:graphicData uri="http://schemas.openxmlformats.org/drawingml/2006/chart">
-            <c:chart xmlns:r="http://schemas.openxmlformats.org/officeDocument/2006/relationships" xmlns:c="http://schemas.openxmlformats.org/drawingml/2006/chart" r:id="Rd37f378c3cec41e1"/>
+            <c:chart xmlns:r="http://schemas.openxmlformats.org/officeDocument/2006/relationships" xmlns:c="http://schemas.openxmlformats.org/drawingml/2006/chart" r:id="R5f281a5839044235"/>
           </a:graphicData>
         </a:graphic>
       </p:graphicFrame>
@@ -10895,6 +11005,7 @@
           <a:lstStyle xmlns:a="http://schemas.openxmlformats.org/drawingml/2006/main"/>
           <a:p xmlns:a="http://schemas.openxmlformats.org/drawingml/2006/main">
             <a:pPr algn="l">
+              <a:buNone/>
               <a:defRPr sz="1125" b="1">
                 <a:solidFill>
                   <a:srgbClr val="124B9A"/>
@@ -10957,6 +11068,7 @@
           <a:lstStyle xmlns:a="http://schemas.openxmlformats.org/drawingml/2006/main"/>
           <a:p xmlns:a="http://schemas.openxmlformats.org/drawingml/2006/main">
             <a:pPr algn="l">
+              <a:buNone/>
               <a:defRPr sz="1500" b="1">
                 <a:solidFill>
                   <a:srgbClr val="0B1220"/>
@@ -10980,6 +11092,7 @@
           </a:p>
           <a:p xmlns:a="http://schemas.openxmlformats.org/drawingml/2006/main">
             <a:pPr algn="l">
+              <a:buNone/>
               <a:defRPr sz="1500" b="1">
                 <a:solidFill>
                   <a:srgbClr val="0B1220"/>
@@ -11003,6 +11116,7 @@
           </a:p>
           <a:p xmlns:a="http://schemas.openxmlformats.org/drawingml/2006/main">
             <a:pPr algn="l">
+              <a:buNone/>
               <a:defRPr sz="1500" b="1">
                 <a:solidFill>
                   <a:srgbClr val="0B1220"/>
@@ -11026,6 +11140,7 @@
           </a:p>
           <a:p xmlns:a="http://schemas.openxmlformats.org/drawingml/2006/main">
             <a:pPr algn="l">
+              <a:buNone/>
               <a:defRPr sz="1500" b="1">
                 <a:solidFill>
                   <a:srgbClr val="0B1220"/>
@@ -11054,6 +11169,7 @@
           </a:p>
           <a:p xmlns:a="http://schemas.openxmlformats.org/drawingml/2006/main">
             <a:pPr algn="l">
+              <a:buNone/>
               <a:defRPr sz="1500" b="1">
                 <a:solidFill>
                   <a:srgbClr val="0B1220"/>
@@ -11077,6 +11193,7 @@
           </a:p>
           <a:p xmlns:a="http://schemas.openxmlformats.org/drawingml/2006/main">
             <a:pPr algn="l">
+              <a:buNone/>
               <a:defRPr sz="1500" b="1">
                 <a:solidFill>
                   <a:srgbClr val="0B1220"/>
@@ -11100,6 +11217,7 @@
           </a:p>
           <a:p xmlns:a="http://schemas.openxmlformats.org/drawingml/2006/main">
             <a:pPr algn="l">
+              <a:buNone/>
               <a:defRPr sz="1500" b="1">
                 <a:solidFill>
                   <a:srgbClr val="0B1220"/>
@@ -11158,6 +11276,7 @@
           <a:lstStyle xmlns:a="http://schemas.openxmlformats.org/drawingml/2006/main"/>
           <a:p xmlns:a="http://schemas.openxmlformats.org/drawingml/2006/main">
             <a:pPr algn="l">
+              <a:buNone/>
               <a:defRPr sz="1500" b="1">
                 <a:solidFill>
                   <a:srgbClr val="124B9A"/>
@@ -11247,6 +11366,7 @@
           <a:lstStyle xmlns:a="http://schemas.openxmlformats.org/drawingml/2006/main"/>
           <a:p xmlns:a="http://schemas.openxmlformats.org/drawingml/2006/main">
             <a:pPr algn="l">
+              <a:buNone/>
               <a:defRPr sz="825" b="0">
                 <a:solidFill>
                   <a:srgbClr val="536174"/>
@@ -11305,6 +11425,7 @@
           <a:lstStyle xmlns:a="http://schemas.openxmlformats.org/drawingml/2006/main"/>
           <a:p xmlns:a="http://schemas.openxmlformats.org/drawingml/2006/main">
             <a:pPr algn="r">
+              <a:buNone/>
               <a:defRPr sz="825" b="1">
                 <a:solidFill>
                   <a:srgbClr val="536174"/>
@@ -11392,6 +11513,7 @@
           <a:lstStyle xmlns:a="http://schemas.openxmlformats.org/drawingml/2006/main"/>
           <a:p xmlns:a="http://schemas.openxmlformats.org/drawingml/2006/main">
             <a:pPr algn="l">
+              <a:buNone/>
               <a:defRPr sz="975" b="1">
                 <a:solidFill>
                   <a:srgbClr val="124B9A"/>
@@ -11450,6 +11572,7 @@
           <a:lstStyle xmlns:a="http://schemas.openxmlformats.org/drawingml/2006/main"/>
           <a:p xmlns:a="http://schemas.openxmlformats.org/drawingml/2006/main">
             <a:pPr algn="l">
+              <a:buNone/>
               <a:defRPr sz="2850" b="1">
                 <a:solidFill>
                   <a:srgbClr val="0B1220"/>
@@ -11607,6 +11730,7 @@
           <a:lstStyle xmlns:a="http://schemas.openxmlformats.org/drawingml/2006/main"/>
           <a:p xmlns:a="http://schemas.openxmlformats.org/drawingml/2006/main">
             <a:pPr algn="l">
+              <a:buNone/>
               <a:defRPr sz="1125" b="1">
                 <a:solidFill>
                   <a:srgbClr val="124B9A"/>
@@ -11665,6 +11789,7 @@
           <a:lstStyle xmlns:a="http://schemas.openxmlformats.org/drawingml/2006/main"/>
           <a:p xmlns:a="http://schemas.openxmlformats.org/drawingml/2006/main">
             <a:pPr algn="l">
+              <a:buNone/>
               <a:defRPr sz="1650" b="1">
                 <a:solidFill>
                   <a:srgbClr val="0B1220"/>
@@ -11693,6 +11818,7 @@
           </a:p>
           <a:p xmlns:a="http://schemas.openxmlformats.org/drawingml/2006/main">
             <a:pPr algn="l">
+              <a:buNone/>
               <a:defRPr sz="1650" b="1">
                 <a:solidFill>
                   <a:srgbClr val="0B1220"/>
@@ -11751,6 +11877,7 @@
           <a:lstStyle xmlns:a="http://schemas.openxmlformats.org/drawingml/2006/main"/>
           <a:p xmlns:a="http://schemas.openxmlformats.org/drawingml/2006/main">
             <a:pPr algn="l">
+              <a:buNone/>
               <a:defRPr sz="1125" b="1">
                 <a:solidFill>
                   <a:srgbClr val="124B9A"/>
@@ -11809,6 +11936,7 @@
           <a:lstStyle xmlns:a="http://schemas.openxmlformats.org/drawingml/2006/main"/>
           <a:p xmlns:a="http://schemas.openxmlformats.org/drawingml/2006/main">
             <a:pPr algn="l">
+              <a:buNone/>
               <a:defRPr sz="1650" b="1">
                 <a:solidFill>
                   <a:srgbClr val="0B1220"/>
@@ -11837,6 +11965,7 @@
           </a:p>
           <a:p xmlns:a="http://schemas.openxmlformats.org/drawingml/2006/main">
             <a:pPr algn="l">
+              <a:buNone/>
               <a:defRPr sz="1650" b="1">
                 <a:solidFill>
                   <a:srgbClr val="0B1220"/>
@@ -11860,6 +11989,7 @@
           </a:p>
           <a:p xmlns:a="http://schemas.openxmlformats.org/drawingml/2006/main">
             <a:pPr algn="l">
+              <a:buNone/>
               <a:defRPr sz="1650" b="1">
                 <a:solidFill>
                   <a:srgbClr val="0B1220"/>
@@ -11918,6 +12048,7 @@
           <a:lstStyle xmlns:a="http://schemas.openxmlformats.org/drawingml/2006/main"/>
           <a:p xmlns:a="http://schemas.openxmlformats.org/drawingml/2006/main">
             <a:pPr algn="l">
+              <a:buNone/>
               <a:defRPr sz="1125" b="1">
                 <a:solidFill>
                   <a:srgbClr val="124B9A"/>
@@ -11976,6 +12107,7 @@
           <a:lstStyle xmlns:a="http://schemas.openxmlformats.org/drawingml/2006/main"/>
           <a:p xmlns:a="http://schemas.openxmlformats.org/drawingml/2006/main">
             <a:pPr algn="l">
+              <a:buNone/>
               <a:defRPr sz="1650" b="1">
                 <a:solidFill>
                   <a:srgbClr val="0B1220"/>
@@ -12004,6 +12136,7 @@
           </a:p>
           <a:p xmlns:a="http://schemas.openxmlformats.org/drawingml/2006/main">
             <a:pPr algn="l">
+              <a:buNone/>
               <a:defRPr sz="1650" b="1">
                 <a:solidFill>
                   <a:srgbClr val="0B1220"/>
@@ -12032,6 +12165,7 @@
           </a:p>
           <a:p xmlns:a="http://schemas.openxmlformats.org/drawingml/2006/main">
             <a:pPr algn="l">
+              <a:buNone/>
               <a:defRPr sz="1650" b="1">
                 <a:solidFill>
                   <a:srgbClr val="0B1220"/>
@@ -12092,6 +12226,7 @@
           <a:lstStyle xmlns:a="http://schemas.openxmlformats.org/drawingml/2006/main"/>
           <a:p xmlns:a="http://schemas.openxmlformats.org/drawingml/2006/main">
             <a:pPr algn="ctr">
+              <a:buNone/>
               <a:defRPr sz="1350" b="1">
                 <a:solidFill>
                   <a:srgbClr val="FFFFFF"/>
@@ -12181,6 +12316,7 @@
           <a:lstStyle xmlns:a="http://schemas.openxmlformats.org/drawingml/2006/main"/>
           <a:p xmlns:a="http://schemas.openxmlformats.org/drawingml/2006/main">
             <a:pPr algn="l">
+              <a:buNone/>
               <a:defRPr sz="825" b="0">
                 <a:solidFill>
                   <a:srgbClr val="536174"/>
@@ -12239,6 +12375,7 @@
           <a:lstStyle xmlns:a="http://schemas.openxmlformats.org/drawingml/2006/main"/>
           <a:p xmlns:a="http://schemas.openxmlformats.org/drawingml/2006/main">
             <a:pPr algn="r">
+              <a:buNone/>
               <a:defRPr sz="825" b="1">
                 <a:solidFill>
                   <a:srgbClr val="536174"/>
@@ -12326,6 +12463,7 @@
           <a:lstStyle xmlns:a="http://schemas.openxmlformats.org/drawingml/2006/main"/>
           <a:p xmlns:a="http://schemas.openxmlformats.org/drawingml/2006/main">
             <a:pPr algn="l">
+              <a:buNone/>
               <a:defRPr sz="975" b="1">
                 <a:solidFill>
                   <a:srgbClr val="124B9A"/>
@@ -12384,6 +12522,7 @@
           <a:lstStyle xmlns:a="http://schemas.openxmlformats.org/drawingml/2006/main"/>
           <a:p xmlns:a="http://schemas.openxmlformats.org/drawingml/2006/main">
             <a:pPr algn="l">
+              <a:buNone/>
               <a:defRPr sz="2850" b="1">
                 <a:solidFill>
                   <a:srgbClr val="0B1220"/>
@@ -12444,6 +12583,7 @@
           <a:lstStyle xmlns:a="http://schemas.openxmlformats.org/drawingml/2006/main"/>
           <a:p xmlns:a="http://schemas.openxmlformats.org/drawingml/2006/main">
             <a:pPr algn="l">
+              <a:buNone/>
               <a:defRPr sz="825" b="1">
                 <a:solidFill>
                   <a:srgbClr val="124B9A"/>
@@ -12469,7 +12609,7 @@
       </p:sp>
       <p:graphicFrame>
         <p:nvGraphicFramePr>
-          <p:cNvPr id="14" name="Chart"/>
+          <p:cNvPr id="16" name="Chart"/>
           <p:cNvGraphicFramePr/>
           <p:nvPr/>
         </p:nvGraphicFramePr>
@@ -12479,7 +12619,7 @@
         </p:xfrm>
         <a:graphic xmlns:a="http://schemas.openxmlformats.org/drawingml/2006/main">
           <a:graphicData uri="http://schemas.openxmlformats.org/drawingml/2006/chart">
-            <c:chart xmlns:r="http://schemas.openxmlformats.org/officeDocument/2006/relationships" xmlns:c="http://schemas.openxmlformats.org/drawingml/2006/chart" r:id="Re286310bb58749f1"/>
+            <c:chart xmlns:r="http://schemas.openxmlformats.org/officeDocument/2006/relationships" xmlns:c="http://schemas.openxmlformats.org/drawingml/2006/chart" r:id="Rcb6ee8acf7fe405a"/>
           </a:graphicData>
         </a:graphic>
       </p:graphicFrame>
@@ -12518,6 +12658,7 @@
           <a:lstStyle xmlns:a="http://schemas.openxmlformats.org/drawingml/2006/main"/>
           <a:p xmlns:a="http://schemas.openxmlformats.org/drawingml/2006/main">
             <a:pPr algn="l">
+              <a:buNone/>
               <a:defRPr sz="1125" b="1">
                 <a:solidFill>
                   <a:srgbClr val="124B9A"/>
@@ -12580,6 +12721,7 @@
           <a:lstStyle xmlns:a="http://schemas.openxmlformats.org/drawingml/2006/main"/>
           <a:p xmlns:a="http://schemas.openxmlformats.org/drawingml/2006/main">
             <a:pPr algn="l">
+              <a:buNone/>
               <a:defRPr sz="1500" b="1">
                 <a:solidFill>
                   <a:srgbClr val="0B1220"/>
@@ -12603,6 +12745,7 @@
           </a:p>
           <a:p xmlns:a="http://schemas.openxmlformats.org/drawingml/2006/main">
             <a:pPr algn="l">
+              <a:buNone/>
               <a:defRPr sz="1500" b="1">
                 <a:solidFill>
                   <a:srgbClr val="0B1220"/>
@@ -12631,6 +12774,7 @@
           </a:p>
           <a:p xmlns:a="http://schemas.openxmlformats.org/drawingml/2006/main">
             <a:pPr algn="l">
+              <a:buNone/>
               <a:defRPr sz="1500" b="1">
                 <a:solidFill>
                   <a:srgbClr val="0B1220"/>
@@ -12654,6 +12798,7 @@
           </a:p>
           <a:p xmlns:a="http://schemas.openxmlformats.org/drawingml/2006/main">
             <a:pPr algn="l">
+              <a:buNone/>
               <a:defRPr sz="1500" b="1">
                 <a:solidFill>
                   <a:srgbClr val="0B1220"/>
@@ -12682,6 +12827,7 @@
           </a:p>
           <a:p xmlns:a="http://schemas.openxmlformats.org/drawingml/2006/main">
             <a:pPr algn="l">
+              <a:buNone/>
               <a:defRPr sz="1500" b="1">
                 <a:solidFill>
                   <a:srgbClr val="0B1220"/>
@@ -12705,6 +12851,7 @@
           </a:p>
           <a:p xmlns:a="http://schemas.openxmlformats.org/drawingml/2006/main">
             <a:pPr algn="l">
+              <a:buNone/>
               <a:defRPr sz="1500" b="1">
                 <a:solidFill>
                   <a:srgbClr val="0B1220"/>
@@ -12733,6 +12880,7 @@
           </a:p>
           <a:p xmlns:a="http://schemas.openxmlformats.org/drawingml/2006/main">
             <a:pPr algn="l">
+              <a:buNone/>
               <a:defRPr sz="1500" b="1">
                 <a:solidFill>
                   <a:srgbClr val="0B1220"/>
@@ -12756,6 +12904,7 @@
           </a:p>
           <a:p xmlns:a="http://schemas.openxmlformats.org/drawingml/2006/main">
             <a:pPr algn="l">
+              <a:buNone/>
               <a:defRPr sz="1500" b="1">
                 <a:solidFill>
                   <a:srgbClr val="0B1220"/>
@@ -12814,6 +12963,7 @@
           <a:lstStyle xmlns:a="http://schemas.openxmlformats.org/drawingml/2006/main"/>
           <a:p xmlns:a="http://schemas.openxmlformats.org/drawingml/2006/main">
             <a:pPr algn="l">
+              <a:buNone/>
               <a:defRPr sz="1500" b="1">
                 <a:solidFill>
                   <a:srgbClr val="124B9A"/>
@@ -12903,6 +13053,7 @@
           <a:lstStyle xmlns:a="http://schemas.openxmlformats.org/drawingml/2006/main"/>
           <a:p xmlns:a="http://schemas.openxmlformats.org/drawingml/2006/main">
             <a:pPr algn="l">
+              <a:buNone/>
               <a:defRPr sz="825" b="0">
                 <a:solidFill>
                   <a:srgbClr val="536174"/>
@@ -12961,6 +13112,7 @@
           <a:lstStyle xmlns:a="http://schemas.openxmlformats.org/drawingml/2006/main"/>
           <a:p xmlns:a="http://schemas.openxmlformats.org/drawingml/2006/main">
             <a:pPr algn="r">
+              <a:buNone/>
               <a:defRPr sz="825" b="1">
                 <a:solidFill>
                   <a:srgbClr val="536174"/>
@@ -13048,6 +13200,7 @@
           <a:lstStyle xmlns:a="http://schemas.openxmlformats.org/drawingml/2006/main"/>
           <a:p xmlns:a="http://schemas.openxmlformats.org/drawingml/2006/main">
             <a:pPr algn="l">
+              <a:buNone/>
               <a:defRPr sz="975" b="1">
                 <a:solidFill>
                   <a:srgbClr val="124B9A"/>
@@ -13106,6 +13259,7 @@
           <a:lstStyle xmlns:a="http://schemas.openxmlformats.org/drawingml/2006/main"/>
           <a:p xmlns:a="http://schemas.openxmlformats.org/drawingml/2006/main">
             <a:pPr algn="l">
+              <a:buNone/>
               <a:defRPr sz="2850" b="1">
                 <a:solidFill>
                   <a:srgbClr val="0B1220"/>
@@ -13166,6 +13320,7 @@
           <a:lstStyle xmlns:a="http://schemas.openxmlformats.org/drawingml/2006/main"/>
           <a:p xmlns:a="http://schemas.openxmlformats.org/drawingml/2006/main">
             <a:pPr algn="l">
+              <a:buNone/>
               <a:defRPr sz="825" b="1">
                 <a:solidFill>
                   <a:srgbClr val="124B9A"/>
@@ -13191,7 +13346,7 @@
       </p:sp>
       <p:graphicFrame>
         <p:nvGraphicFramePr>
-          <p:cNvPr id="14" name="Chart"/>
+          <p:cNvPr id="17" name="Chart"/>
           <p:cNvGraphicFramePr/>
           <p:nvPr/>
         </p:nvGraphicFramePr>
@@ -13201,7 +13356,7 @@
         </p:xfrm>
         <a:graphic xmlns:a="http://schemas.openxmlformats.org/drawingml/2006/main">
           <a:graphicData uri="http://schemas.openxmlformats.org/drawingml/2006/chart">
-            <c:chart xmlns:r="http://schemas.openxmlformats.org/officeDocument/2006/relationships" xmlns:c="http://schemas.openxmlformats.org/drawingml/2006/chart" r:id="R3c3a782e43064afb"/>
+            <c:chart xmlns:r="http://schemas.openxmlformats.org/officeDocument/2006/relationships" xmlns:c="http://schemas.openxmlformats.org/drawingml/2006/chart" r:id="R45e1552fb2dd4ca4"/>
           </a:graphicData>
         </a:graphic>
       </p:graphicFrame>
@@ -13240,6 +13395,7 @@
           <a:lstStyle xmlns:a="http://schemas.openxmlformats.org/drawingml/2006/main"/>
           <a:p xmlns:a="http://schemas.openxmlformats.org/drawingml/2006/main">
             <a:pPr algn="l">
+              <a:buNone/>
               <a:defRPr sz="1125" b="1">
                 <a:solidFill>
                   <a:srgbClr val="124B9A"/>
@@ -13265,7 +13421,7 @@
       </p:sp>
       <p:graphicFrame>
         <p:nvGraphicFramePr>
-          <p:cNvPr id="16" name=""/>
+          <p:cNvPr id="19" name=""/>
           <p:cNvGraphicFramePr/>
           <p:nvPr/>
         </p:nvGraphicFramePr>
@@ -13534,6 +13690,7 @@
           <a:lstStyle xmlns:a="http://schemas.openxmlformats.org/drawingml/2006/main"/>
           <a:p xmlns:a="http://schemas.openxmlformats.org/drawingml/2006/main">
             <a:pPr algn="l">
+              <a:buNone/>
               <a:defRPr sz="1425" b="1">
                 <a:solidFill>
                   <a:srgbClr val="124B9A"/>
@@ -13557,6 +13714,7 @@
           </a:p>
           <a:p xmlns:a="http://schemas.openxmlformats.org/drawingml/2006/main">
             <a:pPr algn="l">
+              <a:buNone/>
               <a:defRPr sz="1425" b="1">
                 <a:solidFill>
                   <a:srgbClr val="124B9A"/>
@@ -13646,6 +13804,7 @@
           <a:lstStyle xmlns:a="http://schemas.openxmlformats.org/drawingml/2006/main"/>
           <a:p xmlns:a="http://schemas.openxmlformats.org/drawingml/2006/main">
             <a:pPr algn="l">
+              <a:buNone/>
               <a:defRPr sz="825" b="0">
                 <a:solidFill>
                   <a:srgbClr val="536174"/>
@@ -13704,6 +13863,7 @@
           <a:lstStyle xmlns:a="http://schemas.openxmlformats.org/drawingml/2006/main"/>
           <a:p xmlns:a="http://schemas.openxmlformats.org/drawingml/2006/main">
             <a:pPr algn="r">
+              <a:buNone/>
               <a:defRPr sz="825" b="1">
                 <a:solidFill>
                   <a:srgbClr val="536174"/>
@@ -13791,6 +13951,7 @@
           <a:lstStyle xmlns:a="http://schemas.openxmlformats.org/drawingml/2006/main"/>
           <a:p xmlns:a="http://schemas.openxmlformats.org/drawingml/2006/main">
             <a:pPr algn="l">
+              <a:buNone/>
               <a:defRPr sz="975" b="1">
                 <a:solidFill>
                   <a:srgbClr val="124B9A"/>
@@ -13849,6 +14010,7 @@
           <a:lstStyle xmlns:a="http://schemas.openxmlformats.org/drawingml/2006/main"/>
           <a:p xmlns:a="http://schemas.openxmlformats.org/drawingml/2006/main">
             <a:pPr algn="l">
+              <a:buNone/>
               <a:defRPr sz="2850" b="1">
                 <a:solidFill>
                   <a:srgbClr val="0B1220"/>
@@ -13938,6 +14100,7 @@
           <a:lstStyle xmlns:a="http://schemas.openxmlformats.org/drawingml/2006/main"/>
           <a:p xmlns:a="http://schemas.openxmlformats.org/drawingml/2006/main">
             <a:pPr algn="l">
+              <a:buNone/>
               <a:defRPr sz="1125" b="1">
                 <a:solidFill>
                   <a:srgbClr val="6DCBF4"/>
@@ -13996,6 +14159,7 @@
           <a:lstStyle xmlns:a="http://schemas.openxmlformats.org/drawingml/2006/main"/>
           <a:p xmlns:a="http://schemas.openxmlformats.org/drawingml/2006/main">
             <a:pPr algn="l">
+              <a:buNone/>
               <a:defRPr sz="2400" b="1">
                 <a:solidFill>
                   <a:srgbClr val="FFFFFF"/>
@@ -14024,6 +14188,7 @@
           </a:p>
           <a:p xmlns:a="http://schemas.openxmlformats.org/drawingml/2006/main">
             <a:pPr algn="l">
+              <a:buNone/>
               <a:defRPr sz="2400" b="1">
                 <a:solidFill>
                   <a:srgbClr val="FFFFFF"/>
@@ -14052,6 +14217,7 @@
           </a:p>
           <a:p xmlns:a="http://schemas.openxmlformats.org/drawingml/2006/main">
             <a:pPr algn="l">
+              <a:buNone/>
               <a:defRPr sz="2400" b="1">
                 <a:solidFill>
                   <a:srgbClr val="FFFFFF"/>
@@ -14080,6 +14246,7 @@
           </a:p>
           <a:p xmlns:a="http://schemas.openxmlformats.org/drawingml/2006/main">
             <a:pPr algn="l">
+              <a:buNone/>
               <a:defRPr sz="2400" b="1">
                 <a:solidFill>
                   <a:srgbClr val="FFFFFF"/>
@@ -14138,6 +14305,7 @@
           <a:lstStyle xmlns:a="http://schemas.openxmlformats.org/drawingml/2006/main"/>
           <a:p xmlns:a="http://schemas.openxmlformats.org/drawingml/2006/main">
             <a:pPr algn="l">
+              <a:buNone/>
               <a:defRPr sz="1500" b="1">
                 <a:solidFill>
                   <a:srgbClr val="FFFFFF"/>
@@ -14161,6 +14329,7 @@
           </a:p>
           <a:p xmlns:a="http://schemas.openxmlformats.org/drawingml/2006/main">
             <a:pPr algn="l">
+              <a:buNone/>
               <a:defRPr sz="1500" b="1">
                 <a:solidFill>
                   <a:srgbClr val="FFFFFF"/>
@@ -14219,6 +14388,7 @@
           <a:lstStyle xmlns:a="http://schemas.openxmlformats.org/drawingml/2006/main"/>
           <a:p xmlns:a="http://schemas.openxmlformats.org/drawingml/2006/main">
             <a:pPr algn="l">
+              <a:buNone/>
               <a:defRPr sz="1125" b="1">
                 <a:solidFill>
                   <a:srgbClr val="124B9A"/>
@@ -14279,6 +14449,7 @@
           <a:lstStyle xmlns:a="http://schemas.openxmlformats.org/drawingml/2006/main"/>
           <a:p xmlns:a="http://schemas.openxmlformats.org/drawingml/2006/main">
             <a:pPr algn="ctr">
+              <a:buNone/>
               <a:defRPr sz="2250" b="1">
                 <a:solidFill>
                   <a:srgbClr val="FFFFFF"/>
@@ -14341,6 +14512,7 @@
           <a:lstStyle xmlns:a="http://schemas.openxmlformats.org/drawingml/2006/main"/>
           <a:p xmlns:a="http://schemas.openxmlformats.org/drawingml/2006/main">
             <a:pPr algn="l">
+              <a:buNone/>
               <a:defRPr sz="1650" b="1">
                 <a:solidFill>
                   <a:srgbClr val="0B1220"/>
@@ -14364,6 +14536,7 @@
           </a:p>
           <a:p xmlns:a="http://schemas.openxmlformats.org/drawingml/2006/main">
             <a:pPr algn="l">
+              <a:buNone/>
               <a:defRPr sz="1650" b="1">
                 <a:solidFill>
                   <a:srgbClr val="0B1220"/>
@@ -14424,6 +14597,7 @@
           <a:lstStyle xmlns:a="http://schemas.openxmlformats.org/drawingml/2006/main"/>
           <a:p xmlns:a="http://schemas.openxmlformats.org/drawingml/2006/main">
             <a:pPr algn="ctr">
+              <a:buNone/>
               <a:defRPr sz="2250" b="1">
                 <a:solidFill>
                   <a:srgbClr val="FFFFFF"/>
@@ -14486,6 +14660,7 @@
           <a:lstStyle xmlns:a="http://schemas.openxmlformats.org/drawingml/2006/main"/>
           <a:p xmlns:a="http://schemas.openxmlformats.org/drawingml/2006/main">
             <a:pPr algn="l">
+              <a:buNone/>
               <a:defRPr sz="1650" b="1">
                 <a:solidFill>
                   <a:srgbClr val="0B1220"/>
@@ -14509,6 +14684,7 @@
           </a:p>
           <a:p xmlns:a="http://schemas.openxmlformats.org/drawingml/2006/main">
             <a:pPr algn="l">
+              <a:buNone/>
               <a:defRPr sz="1650" b="1">
                 <a:solidFill>
                   <a:srgbClr val="0B1220"/>
@@ -14569,6 +14745,7 @@
           <a:lstStyle xmlns:a="http://schemas.openxmlformats.org/drawingml/2006/main"/>
           <a:p xmlns:a="http://schemas.openxmlformats.org/drawingml/2006/main">
             <a:pPr algn="ctr">
+              <a:buNone/>
               <a:defRPr sz="2250" b="1">
                 <a:solidFill>
                   <a:srgbClr val="FFFFFF"/>
@@ -14631,6 +14808,7 @@
           <a:lstStyle xmlns:a="http://schemas.openxmlformats.org/drawingml/2006/main"/>
           <a:p xmlns:a="http://schemas.openxmlformats.org/drawingml/2006/main">
             <a:pPr algn="l">
+              <a:buNone/>
               <a:defRPr sz="1650" b="1">
                 <a:solidFill>
                   <a:srgbClr val="0B1220"/>
@@ -14654,6 +14832,7 @@
           </a:p>
           <a:p xmlns:a="http://schemas.openxmlformats.org/drawingml/2006/main">
             <a:pPr algn="l">
+              <a:buNone/>
               <a:defRPr sz="1650" b="1">
                 <a:solidFill>
                   <a:srgbClr val="0B1220"/>
@@ -14743,6 +14922,7 @@
           <a:lstStyle xmlns:a="http://schemas.openxmlformats.org/drawingml/2006/main"/>
           <a:p xmlns:a="http://schemas.openxmlformats.org/drawingml/2006/main">
             <a:pPr algn="l">
+              <a:buNone/>
               <a:defRPr sz="825" b="0">
                 <a:solidFill>
                   <a:srgbClr val="536174"/>
@@ -14801,6 +14981,7 @@
           <a:lstStyle xmlns:a="http://schemas.openxmlformats.org/drawingml/2006/main"/>
           <a:p xmlns:a="http://schemas.openxmlformats.org/drawingml/2006/main">
             <a:pPr algn="r">
+              <a:buNone/>
               <a:defRPr sz="825" b="1">
                 <a:solidFill>
                   <a:srgbClr val="536174"/>
@@ -14888,6 +15069,7 @@
           <a:lstStyle xmlns:a="http://schemas.openxmlformats.org/drawingml/2006/main"/>
           <a:p xmlns:a="http://schemas.openxmlformats.org/drawingml/2006/main">
             <a:pPr algn="l">
+              <a:buNone/>
               <a:defRPr sz="975" b="1">
                 <a:solidFill>
                   <a:srgbClr val="124B9A"/>
@@ -14946,6 +15128,7 @@
           <a:lstStyle xmlns:a="http://schemas.openxmlformats.org/drawingml/2006/main"/>
           <a:p xmlns:a="http://schemas.openxmlformats.org/drawingml/2006/main">
             <a:pPr algn="l">
+              <a:buNone/>
               <a:defRPr sz="2850" b="1">
                 <a:solidFill>
                   <a:srgbClr val="0B1220"/>
@@ -15068,6 +15251,7 @@
           <a:lstStyle xmlns:a="http://schemas.openxmlformats.org/drawingml/2006/main"/>
           <a:p xmlns:a="http://schemas.openxmlformats.org/drawingml/2006/main">
             <a:pPr algn="ctr">
+              <a:buNone/>
               <a:defRPr sz="1125" b="1">
                 <a:solidFill>
                   <a:srgbClr val="124B9A"/>
@@ -15126,6 +15310,7 @@
           <a:lstStyle xmlns:a="http://schemas.openxmlformats.org/drawingml/2006/main"/>
           <a:p xmlns:a="http://schemas.openxmlformats.org/drawingml/2006/main">
             <a:pPr algn="ctr">
+              <a:buNone/>
               <a:defRPr sz="1500" b="1">
                 <a:solidFill>
                   <a:srgbClr val="0B1220"/>
@@ -15154,6 +15339,7 @@
           </a:p>
           <a:p xmlns:a="http://schemas.openxmlformats.org/drawingml/2006/main">
             <a:pPr algn="ctr">
+              <a:buNone/>
               <a:defRPr sz="1500" b="1">
                 <a:solidFill>
                   <a:srgbClr val="0B1220"/>
@@ -15245,6 +15431,7 @@
           <a:lstStyle xmlns:a="http://schemas.openxmlformats.org/drawingml/2006/main"/>
           <a:p xmlns:a="http://schemas.openxmlformats.org/drawingml/2006/main">
             <a:pPr algn="ctr">
+              <a:buNone/>
               <a:defRPr sz="1125" b="1">
                 <a:solidFill>
                   <a:srgbClr val="124B9A"/>
@@ -15303,6 +15490,7 @@
           <a:lstStyle xmlns:a="http://schemas.openxmlformats.org/drawingml/2006/main"/>
           <a:p xmlns:a="http://schemas.openxmlformats.org/drawingml/2006/main">
             <a:pPr algn="ctr">
+              <a:buNone/>
               <a:defRPr sz="1500" b="1">
                 <a:solidFill>
                   <a:srgbClr val="0B1220"/>
@@ -15331,6 +15519,7 @@
           </a:p>
           <a:p xmlns:a="http://schemas.openxmlformats.org/drawingml/2006/main">
             <a:pPr algn="ctr">
+              <a:buNone/>
               <a:defRPr sz="1500" b="1">
                 <a:solidFill>
                   <a:srgbClr val="0B1220"/>
@@ -15422,6 +15611,7 @@
           <a:lstStyle xmlns:a="http://schemas.openxmlformats.org/drawingml/2006/main"/>
           <a:p xmlns:a="http://schemas.openxmlformats.org/drawingml/2006/main">
             <a:pPr algn="ctr">
+              <a:buNone/>
               <a:defRPr sz="1125" b="1">
                 <a:solidFill>
                   <a:srgbClr val="124B9A"/>
@@ -15480,6 +15670,7 @@
           <a:lstStyle xmlns:a="http://schemas.openxmlformats.org/drawingml/2006/main"/>
           <a:p xmlns:a="http://schemas.openxmlformats.org/drawingml/2006/main">
             <a:pPr algn="ctr">
+              <a:buNone/>
               <a:defRPr sz="1500" b="1">
                 <a:solidFill>
                   <a:srgbClr val="0B1220"/>
@@ -15508,6 +15699,7 @@
           </a:p>
           <a:p xmlns:a="http://schemas.openxmlformats.org/drawingml/2006/main">
             <a:pPr algn="ctr">
+              <a:buNone/>
               <a:defRPr sz="1500" b="1">
                 <a:solidFill>
                   <a:srgbClr val="0B1220"/>
@@ -15599,6 +15791,7 @@
           <a:lstStyle xmlns:a="http://schemas.openxmlformats.org/drawingml/2006/main"/>
           <a:p xmlns:a="http://schemas.openxmlformats.org/drawingml/2006/main">
             <a:pPr algn="ctr">
+              <a:buNone/>
               <a:defRPr sz="1125" b="1">
                 <a:solidFill>
                   <a:srgbClr val="124B9A"/>
@@ -15657,6 +15850,7 @@
           <a:lstStyle xmlns:a="http://schemas.openxmlformats.org/drawingml/2006/main"/>
           <a:p xmlns:a="http://schemas.openxmlformats.org/drawingml/2006/main">
             <a:pPr algn="ctr">
+              <a:buNone/>
               <a:defRPr sz="1500" b="1">
                 <a:solidFill>
                   <a:srgbClr val="0B1220"/>
@@ -15685,6 +15879,7 @@
           </a:p>
           <a:p xmlns:a="http://schemas.openxmlformats.org/drawingml/2006/main">
             <a:pPr algn="ctr">
+              <a:buNone/>
               <a:defRPr sz="1500" b="1">
                 <a:solidFill>
                   <a:srgbClr val="0B1220"/>
@@ -15776,6 +15971,7 @@
           <a:lstStyle xmlns:a="http://schemas.openxmlformats.org/drawingml/2006/main"/>
           <a:p xmlns:a="http://schemas.openxmlformats.org/drawingml/2006/main">
             <a:pPr algn="ctr">
+              <a:buNone/>
               <a:defRPr sz="1500" b="1">
                 <a:solidFill>
                   <a:srgbClr val="0B1220"/>
@@ -15865,6 +16061,7 @@
           <a:lstStyle xmlns:a="http://schemas.openxmlformats.org/drawingml/2006/main"/>
           <a:p xmlns:a="http://schemas.openxmlformats.org/drawingml/2006/main">
             <a:pPr algn="l">
+              <a:buNone/>
               <a:defRPr sz="825" b="0">
                 <a:solidFill>
                   <a:srgbClr val="536174"/>
@@ -15923,6 +16120,7 @@
           <a:lstStyle xmlns:a="http://schemas.openxmlformats.org/drawingml/2006/main"/>
           <a:p xmlns:a="http://schemas.openxmlformats.org/drawingml/2006/main">
             <a:pPr algn="r">
+              <a:buNone/>
               <a:defRPr sz="825" b="1">
                 <a:solidFill>
                   <a:srgbClr val="536174"/>
@@ -16010,6 +16208,7 @@
           <a:lstStyle xmlns:a="http://schemas.openxmlformats.org/drawingml/2006/main"/>
           <a:p xmlns:a="http://schemas.openxmlformats.org/drawingml/2006/main">
             <a:pPr algn="l">
+              <a:buNone/>
               <a:defRPr sz="975" b="1">
                 <a:solidFill>
                   <a:srgbClr val="124B9A"/>
@@ -16068,6 +16267,7 @@
           <a:lstStyle xmlns:a="http://schemas.openxmlformats.org/drawingml/2006/main"/>
           <a:p xmlns:a="http://schemas.openxmlformats.org/drawingml/2006/main">
             <a:pPr algn="l">
+              <a:buNone/>
               <a:defRPr sz="2850" b="1">
                 <a:solidFill>
                   <a:srgbClr val="0B1220"/>
@@ -16126,6 +16326,7 @@
           <a:lstStyle xmlns:a="http://schemas.openxmlformats.org/drawingml/2006/main"/>
           <a:p xmlns:a="http://schemas.openxmlformats.org/drawingml/2006/main">
             <a:pPr algn="l">
+              <a:buNone/>
               <a:defRPr sz="1650" b="1">
                 <a:solidFill>
                   <a:srgbClr val="124B9A"/>
@@ -16151,7 +16352,7 @@
       </p:sp>
       <p:graphicFrame>
         <p:nvGraphicFramePr>
-          <p:cNvPr id="12" name=""/>
+          <p:cNvPr id="14" name=""/>
           <p:cNvGraphicFramePr/>
           <p:nvPr/>
         </p:nvGraphicFramePr>
@@ -16721,6 +16922,7 @@
           <a:lstStyle xmlns:a="http://schemas.openxmlformats.org/drawingml/2006/main"/>
           <a:p xmlns:a="http://schemas.openxmlformats.org/drawingml/2006/main">
             <a:pPr algn="ctr">
+              <a:buNone/>
               <a:defRPr sz="1800" b="1">
                 <a:solidFill>
                   <a:srgbClr val="FFFFFF"/>
@@ -16810,6 +17012,7 @@
           <a:lstStyle xmlns:a="http://schemas.openxmlformats.org/drawingml/2006/main"/>
           <a:p xmlns:a="http://schemas.openxmlformats.org/drawingml/2006/main">
             <a:pPr algn="l">
+              <a:buNone/>
               <a:defRPr sz="825" b="0">
                 <a:solidFill>
                   <a:srgbClr val="536174"/>
@@ -16868,6 +17071,7 @@
           <a:lstStyle xmlns:a="http://schemas.openxmlformats.org/drawingml/2006/main"/>
           <a:p xmlns:a="http://schemas.openxmlformats.org/drawingml/2006/main">
             <a:pPr algn="r">
+              <a:buNone/>
               <a:defRPr sz="825" b="1">
                 <a:solidFill>
                   <a:srgbClr val="536174"/>
